--- a/img/Groß_Ophoff et al (2023)_adapted.pptx
+++ b/img/Groß_Ophoff et al (2023)_adapted.pptx
@@ -250,7 +250,7 @@
           <a:p>
             <a:fld id="{2F5C0E49-5901-4A70-B0E2-4707CC9925D2}" type="datetimeFigureOut">
               <a:rPr lang="en-US" smtClean="0"/>
-              <a:t>6/8/26</a:t>
+              <a:t>6/9/26</a:t>
             </a:fld>
             <a:endParaRPr lang="en-US"/>
           </a:p>
@@ -420,7 +420,7 @@
           <a:p>
             <a:fld id="{2F5C0E49-5901-4A70-B0E2-4707CC9925D2}" type="datetimeFigureOut">
               <a:rPr lang="en-US" smtClean="0"/>
-              <a:t>6/8/26</a:t>
+              <a:t>6/9/26</a:t>
             </a:fld>
             <a:endParaRPr lang="en-US"/>
           </a:p>
@@ -600,7 +600,7 @@
           <a:p>
             <a:fld id="{2F5C0E49-5901-4A70-B0E2-4707CC9925D2}" type="datetimeFigureOut">
               <a:rPr lang="en-US" smtClean="0"/>
-              <a:t>6/8/26</a:t>
+              <a:t>6/9/26</a:t>
             </a:fld>
             <a:endParaRPr lang="en-US"/>
           </a:p>
@@ -770,7 +770,7 @@
           <a:p>
             <a:fld id="{2F5C0E49-5901-4A70-B0E2-4707CC9925D2}" type="datetimeFigureOut">
               <a:rPr lang="en-US" smtClean="0"/>
-              <a:t>6/8/26</a:t>
+              <a:t>6/9/26</a:t>
             </a:fld>
             <a:endParaRPr lang="en-US"/>
           </a:p>
@@ -1016,7 +1016,7 @@
           <a:p>
             <a:fld id="{2F5C0E49-5901-4A70-B0E2-4707CC9925D2}" type="datetimeFigureOut">
               <a:rPr lang="en-US" smtClean="0"/>
-              <a:t>6/8/26</a:t>
+              <a:t>6/9/26</a:t>
             </a:fld>
             <a:endParaRPr lang="en-US"/>
           </a:p>
@@ -1248,7 +1248,7 @@
           <a:p>
             <a:fld id="{2F5C0E49-5901-4A70-B0E2-4707CC9925D2}" type="datetimeFigureOut">
               <a:rPr lang="en-US" smtClean="0"/>
-              <a:t>6/8/26</a:t>
+              <a:t>6/9/26</a:t>
             </a:fld>
             <a:endParaRPr lang="en-US"/>
           </a:p>
@@ -1615,7 +1615,7 @@
           <a:p>
             <a:fld id="{2F5C0E49-5901-4A70-B0E2-4707CC9925D2}" type="datetimeFigureOut">
               <a:rPr lang="en-US" smtClean="0"/>
-              <a:t>6/8/26</a:t>
+              <a:t>6/9/26</a:t>
             </a:fld>
             <a:endParaRPr lang="en-US"/>
           </a:p>
@@ -1733,7 +1733,7 @@
           <a:p>
             <a:fld id="{2F5C0E49-5901-4A70-B0E2-4707CC9925D2}" type="datetimeFigureOut">
               <a:rPr lang="en-US" smtClean="0"/>
-              <a:t>6/8/26</a:t>
+              <a:t>6/9/26</a:t>
             </a:fld>
             <a:endParaRPr lang="en-US"/>
           </a:p>
@@ -1828,7 +1828,7 @@
           <a:p>
             <a:fld id="{2F5C0E49-5901-4A70-B0E2-4707CC9925D2}" type="datetimeFigureOut">
               <a:rPr lang="en-US" smtClean="0"/>
-              <a:t>6/8/26</a:t>
+              <a:t>6/9/26</a:t>
             </a:fld>
             <a:endParaRPr lang="en-US"/>
           </a:p>
@@ -2105,7 +2105,7 @@
           <a:p>
             <a:fld id="{2F5C0E49-5901-4A70-B0E2-4707CC9925D2}" type="datetimeFigureOut">
               <a:rPr lang="en-US" smtClean="0"/>
-              <a:t>6/8/26</a:t>
+              <a:t>6/9/26</a:t>
             </a:fld>
             <a:endParaRPr lang="en-US"/>
           </a:p>
@@ -2362,7 +2362,7 @@
           <a:p>
             <a:fld id="{2F5C0E49-5901-4A70-B0E2-4707CC9925D2}" type="datetimeFigureOut">
               <a:rPr lang="en-US" smtClean="0"/>
-              <a:t>6/8/26</a:t>
+              <a:t>6/9/26</a:t>
             </a:fld>
             <a:endParaRPr lang="en-US"/>
           </a:p>
@@ -2578,7 +2578,7 @@
           <a:p>
             <a:fld id="{2F5C0E49-5901-4A70-B0E2-4707CC9925D2}" type="datetimeFigureOut">
               <a:rPr lang="en-US" smtClean="0"/>
-              <a:t>6/8/26</a:t>
+              <a:t>6/9/26</a:t>
             </a:fld>
             <a:endParaRPr lang="en-US"/>
           </a:p>
@@ -2967,7 +2967,7 @@
 </file>
 
 <file path=ppt/slides/slide1.xml><?xml version="1.0" encoding="utf-8"?>
-<p:sld xmlns:a="http://schemas.openxmlformats.org/drawingml/2006/main" xmlns:r="http://schemas.openxmlformats.org/officeDocument/2006/relationships" xmlns:p="http://schemas.openxmlformats.org/presentationml/2006/main">
+<p:sld xmlns:a="http://schemas.openxmlformats.org/drawingml/2006/main" xmlns:r="http://schemas.openxmlformats.org/officeDocument/2006/relationships" xmlns:p="http://schemas.openxmlformats.org/presentationml/2006/main" show="0">
   <p:cSld>
     <p:spTree>
       <p:nvGrpSpPr>
@@ -9727,23 +9727,23 @@
       </p:cxnSp>
       <p:cxnSp>
         <p:nvCxnSpPr>
-          <p:cNvPr id="9" name="Gerade Verbindung mit Pfeil 8">
-            <a:extLst>
-              <a:ext uri="{FF2B5EF4-FFF2-40B4-BE49-F238E27FC236}">
-                <a16:creationId xmlns:a16="http://schemas.microsoft.com/office/drawing/2014/main" id="{AA1D451D-3BB2-FAB0-E972-121812933199}"/>
+          <p:cNvPr id="19" name="Gerade Verbindung mit Pfeil 18">
+            <a:extLst>
+              <a:ext uri="{FF2B5EF4-FFF2-40B4-BE49-F238E27FC236}">
+                <a16:creationId xmlns:a16="http://schemas.microsoft.com/office/drawing/2014/main" id="{182126C1-1BA6-7F1F-C0EC-ABB7832A873C}"/>
               </a:ext>
             </a:extLst>
           </p:cNvPr>
           <p:cNvCxnSpPr>
             <a:cxnSpLocks/>
-            <a:stCxn id="18" idx="2"/>
+            <a:stCxn id="12" idx="2"/>
           </p:cNvCxnSpPr>
           <p:nvPr/>
         </p:nvCxnSpPr>
         <p:spPr>
-          <a:xfrm>
-            <a:off x="3930104" y="2339418"/>
-            <a:ext cx="1638762" cy="432962"/>
+          <a:xfrm flipH="1">
+            <a:off x="3835402" y="1389105"/>
+            <a:ext cx="1000487" cy="2427520"/>
           </a:xfrm>
           <a:prstGeom prst="straightConnector1">
             <a:avLst/>
@@ -9771,167 +9771,6 @@
           </a:fontRef>
         </p:style>
       </p:cxnSp>
-      <p:sp>
-        <p:nvSpPr>
-          <p:cNvPr id="18" name="Rechteck 17">
-            <a:extLst>
-              <a:ext uri="{FF2B5EF4-FFF2-40B4-BE49-F238E27FC236}">
-                <a16:creationId xmlns:a16="http://schemas.microsoft.com/office/drawing/2014/main" id="{A9A91E3D-C75F-79DE-2513-F4E268CECF48}"/>
-              </a:ext>
-            </a:extLst>
-          </p:cNvPr>
-          <p:cNvSpPr/>
-          <p:nvPr/>
-        </p:nvSpPr>
-        <p:spPr>
-          <a:xfrm>
-            <a:off x="2929619" y="1444097"/>
-            <a:ext cx="2000973" cy="895323"/>
-          </a:xfrm>
-          <a:prstGeom prst="rect">
-            <a:avLst/>
-          </a:prstGeom>
-          <a:noFill/>
-          <a:ln w="28575">
-            <a:solidFill>
-              <a:srgbClr val="8CD000"/>
-            </a:solidFill>
-          </a:ln>
-        </p:spPr>
-        <p:style>
-          <a:lnRef idx="2">
-            <a:schemeClr val="accent6"/>
-          </a:lnRef>
-          <a:fillRef idx="1">
-            <a:schemeClr val="lt1"/>
-          </a:fillRef>
-          <a:effectRef idx="0">
-            <a:schemeClr val="accent6"/>
-          </a:effectRef>
-          <a:fontRef idx="minor">
-            <a:schemeClr val="dk1"/>
-          </a:fontRef>
-        </p:style>
-        <p:txBody>
-          <a:bodyPr rtlCol="0" anchor="ctr"/>
-          <a:lstStyle/>
-          <a:p>
-            <a:pPr algn="ctr"/>
-            <a:r>
-              <a:rPr lang="de-DE" dirty="0">
-                <a:solidFill>
-                  <a:srgbClr val="8CD000"/>
-                </a:solidFill>
-                <a:latin typeface="LM Roman 10" pitchFamily="2" charset="77"/>
-              </a:rPr>
-              <a:t>Forschungs-methodisches Wissen  </a:t>
-            </a:r>
-          </a:p>
-        </p:txBody>
-      </p:sp>
-      <p:cxnSp>
-        <p:nvCxnSpPr>
-          <p:cNvPr id="19" name="Gerade Verbindung mit Pfeil 18">
-            <a:extLst>
-              <a:ext uri="{FF2B5EF4-FFF2-40B4-BE49-F238E27FC236}">
-                <a16:creationId xmlns:a16="http://schemas.microsoft.com/office/drawing/2014/main" id="{182126C1-1BA6-7F1F-C0EC-ABB7832A873C}"/>
-              </a:ext>
-            </a:extLst>
-          </p:cNvPr>
-          <p:cNvCxnSpPr>
-            <a:cxnSpLocks/>
-          </p:cNvCxnSpPr>
-          <p:nvPr/>
-        </p:nvCxnSpPr>
-        <p:spPr>
-          <a:xfrm>
-            <a:off x="2929619" y="3124154"/>
-            <a:ext cx="905783" cy="692471"/>
-          </a:xfrm>
-          <a:prstGeom prst="straightConnector1">
-            <a:avLst/>
-          </a:prstGeom>
-          <a:ln w="28575">
-            <a:solidFill>
-              <a:srgbClr val="8CD000"/>
-            </a:solidFill>
-            <a:prstDash val="dash"/>
-            <a:tailEnd type="triangle"/>
-          </a:ln>
-        </p:spPr>
-        <p:style>
-          <a:lnRef idx="1">
-            <a:schemeClr val="accent1"/>
-          </a:lnRef>
-          <a:fillRef idx="0">
-            <a:schemeClr val="accent1"/>
-          </a:fillRef>
-          <a:effectRef idx="0">
-            <a:schemeClr val="accent1"/>
-          </a:effectRef>
-          <a:fontRef idx="minor">
-            <a:schemeClr val="tx1"/>
-          </a:fontRef>
-        </p:style>
-      </p:cxnSp>
-      <p:sp>
-        <p:nvSpPr>
-          <p:cNvPr id="22" name="Rechteck 21">
-            <a:extLst>
-              <a:ext uri="{FF2B5EF4-FFF2-40B4-BE49-F238E27FC236}">
-                <a16:creationId xmlns:a16="http://schemas.microsoft.com/office/drawing/2014/main" id="{1BA4E8EE-C999-8B1E-A91F-3646BAC44777}"/>
-              </a:ext>
-            </a:extLst>
-          </p:cNvPr>
-          <p:cNvSpPr/>
-          <p:nvPr/>
-        </p:nvSpPr>
-        <p:spPr>
-          <a:xfrm>
-            <a:off x="1485900" y="2619338"/>
-            <a:ext cx="1876697" cy="504814"/>
-          </a:xfrm>
-          <a:prstGeom prst="rect">
-            <a:avLst/>
-          </a:prstGeom>
-          <a:noFill/>
-          <a:ln w="28575">
-            <a:solidFill>
-              <a:srgbClr val="8CD000"/>
-            </a:solidFill>
-          </a:ln>
-        </p:spPr>
-        <p:style>
-          <a:lnRef idx="2">
-            <a:schemeClr val="accent6"/>
-          </a:lnRef>
-          <a:fillRef idx="1">
-            <a:schemeClr val="lt1"/>
-          </a:fillRef>
-          <a:effectRef idx="0">
-            <a:schemeClr val="accent6"/>
-          </a:effectRef>
-          <a:fontRef idx="minor">
-            <a:schemeClr val="dk1"/>
-          </a:fontRef>
-        </p:style>
-        <p:txBody>
-          <a:bodyPr rtlCol="0" anchor="ctr"/>
-          <a:lstStyle/>
-          <a:p>
-            <a:pPr algn="ctr"/>
-            <a:r>
-              <a:rPr lang="de-DE" dirty="0">
-                <a:solidFill>
-                  <a:srgbClr val="8CD000"/>
-                </a:solidFill>
-                <a:latin typeface="LM Roman 10" pitchFamily="2" charset="77"/>
-              </a:rPr>
-              <a:t>Zugänglichkeit der Evidenz </a:t>
-            </a:r>
-          </a:p>
-        </p:txBody>
-      </p:sp>
       <p:sp>
         <p:nvSpPr>
           <p:cNvPr id="24" name="Rectangle: Rounded Corners 6">
@@ -11598,213 +11437,6 @@
           </a:fontRef>
         </p:style>
       </p:cxnSp>
-      <p:cxnSp>
-        <p:nvCxnSpPr>
-          <p:cNvPr id="28" name="Gerade Verbindung mit Pfeil 27">
-            <a:extLst>
-              <a:ext uri="{FF2B5EF4-FFF2-40B4-BE49-F238E27FC236}">
-                <a16:creationId xmlns:a16="http://schemas.microsoft.com/office/drawing/2014/main" id="{746BABF6-A958-660C-A0BF-6DE0C4791FC2}"/>
-              </a:ext>
-            </a:extLst>
-          </p:cNvPr>
-          <p:cNvCxnSpPr>
-            <a:cxnSpLocks/>
-            <a:stCxn id="29" idx="2"/>
-          </p:cNvCxnSpPr>
-          <p:nvPr/>
-        </p:nvCxnSpPr>
-        <p:spPr>
-          <a:xfrm>
-            <a:off x="3930104" y="2339418"/>
-            <a:ext cx="1638762" cy="432962"/>
-          </a:xfrm>
-          <a:prstGeom prst="straightConnector1">
-            <a:avLst/>
-          </a:prstGeom>
-          <a:ln w="28575">
-            <a:solidFill>
-              <a:srgbClr val="8CD000"/>
-            </a:solidFill>
-            <a:prstDash val="dash"/>
-            <a:tailEnd type="triangle"/>
-          </a:ln>
-        </p:spPr>
-        <p:style>
-          <a:lnRef idx="1">
-            <a:schemeClr val="accent1"/>
-          </a:lnRef>
-          <a:fillRef idx="0">
-            <a:schemeClr val="accent1"/>
-          </a:fillRef>
-          <a:effectRef idx="0">
-            <a:schemeClr val="accent1"/>
-          </a:effectRef>
-          <a:fontRef idx="minor">
-            <a:schemeClr val="tx1"/>
-          </a:fontRef>
-        </p:style>
-      </p:cxnSp>
-      <p:sp>
-        <p:nvSpPr>
-          <p:cNvPr id="29" name="Rechteck 28">
-            <a:extLst>
-              <a:ext uri="{FF2B5EF4-FFF2-40B4-BE49-F238E27FC236}">
-                <a16:creationId xmlns:a16="http://schemas.microsoft.com/office/drawing/2014/main" id="{6EA267F4-BA55-D09C-2863-1DE13AFEDCF4}"/>
-              </a:ext>
-            </a:extLst>
-          </p:cNvPr>
-          <p:cNvSpPr/>
-          <p:nvPr/>
-        </p:nvSpPr>
-        <p:spPr>
-          <a:xfrm>
-            <a:off x="2929619" y="1444097"/>
-            <a:ext cx="2000973" cy="895323"/>
-          </a:xfrm>
-          <a:prstGeom prst="rect">
-            <a:avLst/>
-          </a:prstGeom>
-          <a:noFill/>
-          <a:ln w="28575">
-            <a:solidFill>
-              <a:srgbClr val="8CD000"/>
-            </a:solidFill>
-          </a:ln>
-        </p:spPr>
-        <p:style>
-          <a:lnRef idx="2">
-            <a:schemeClr val="accent6"/>
-          </a:lnRef>
-          <a:fillRef idx="1">
-            <a:schemeClr val="lt1"/>
-          </a:fillRef>
-          <a:effectRef idx="0">
-            <a:schemeClr val="accent6"/>
-          </a:effectRef>
-          <a:fontRef idx="minor">
-            <a:schemeClr val="dk1"/>
-          </a:fontRef>
-        </p:style>
-        <p:txBody>
-          <a:bodyPr rtlCol="0" anchor="ctr"/>
-          <a:lstStyle/>
-          <a:p>
-            <a:pPr algn="ctr"/>
-            <a:r>
-              <a:rPr lang="de-DE" dirty="0">
-                <a:solidFill>
-                  <a:srgbClr val="8CD000"/>
-                </a:solidFill>
-                <a:latin typeface="LM Roman 10" pitchFamily="2" charset="77"/>
-              </a:rPr>
-              <a:t>Forschungs-methodisches Wissen  </a:t>
-            </a:r>
-          </a:p>
-        </p:txBody>
-      </p:sp>
-      <p:cxnSp>
-        <p:nvCxnSpPr>
-          <p:cNvPr id="30" name="Gerade Verbindung mit Pfeil 29">
-            <a:extLst>
-              <a:ext uri="{FF2B5EF4-FFF2-40B4-BE49-F238E27FC236}">
-                <a16:creationId xmlns:a16="http://schemas.microsoft.com/office/drawing/2014/main" id="{23ECB488-2303-B7AA-619C-A050D151594C}"/>
-              </a:ext>
-            </a:extLst>
-          </p:cNvPr>
-          <p:cNvCxnSpPr>
-            <a:cxnSpLocks/>
-          </p:cNvCxnSpPr>
-          <p:nvPr/>
-        </p:nvCxnSpPr>
-        <p:spPr>
-          <a:xfrm>
-            <a:off x="2929619" y="3124154"/>
-            <a:ext cx="905783" cy="692471"/>
-          </a:xfrm>
-          <a:prstGeom prst="straightConnector1">
-            <a:avLst/>
-          </a:prstGeom>
-          <a:ln w="28575">
-            <a:solidFill>
-              <a:srgbClr val="8CD000"/>
-            </a:solidFill>
-            <a:prstDash val="dash"/>
-            <a:tailEnd type="triangle"/>
-          </a:ln>
-        </p:spPr>
-        <p:style>
-          <a:lnRef idx="1">
-            <a:schemeClr val="accent1"/>
-          </a:lnRef>
-          <a:fillRef idx="0">
-            <a:schemeClr val="accent1"/>
-          </a:fillRef>
-          <a:effectRef idx="0">
-            <a:schemeClr val="accent1"/>
-          </a:effectRef>
-          <a:fontRef idx="minor">
-            <a:schemeClr val="tx1"/>
-          </a:fontRef>
-        </p:style>
-      </p:cxnSp>
-      <p:sp>
-        <p:nvSpPr>
-          <p:cNvPr id="31" name="Rechteck 30">
-            <a:extLst>
-              <a:ext uri="{FF2B5EF4-FFF2-40B4-BE49-F238E27FC236}">
-                <a16:creationId xmlns:a16="http://schemas.microsoft.com/office/drawing/2014/main" id="{E0F47FE2-1B73-689E-6882-C8AFF0414D1A}"/>
-              </a:ext>
-            </a:extLst>
-          </p:cNvPr>
-          <p:cNvSpPr/>
-          <p:nvPr/>
-        </p:nvSpPr>
-        <p:spPr>
-          <a:xfrm>
-            <a:off x="1485900" y="2619338"/>
-            <a:ext cx="1876697" cy="504814"/>
-          </a:xfrm>
-          <a:prstGeom prst="rect">
-            <a:avLst/>
-          </a:prstGeom>
-          <a:noFill/>
-          <a:ln w="28575">
-            <a:solidFill>
-              <a:srgbClr val="8CD000"/>
-            </a:solidFill>
-          </a:ln>
-        </p:spPr>
-        <p:style>
-          <a:lnRef idx="2">
-            <a:schemeClr val="accent6"/>
-          </a:lnRef>
-          <a:fillRef idx="1">
-            <a:schemeClr val="lt1"/>
-          </a:fillRef>
-          <a:effectRef idx="0">
-            <a:schemeClr val="accent6"/>
-          </a:effectRef>
-          <a:fontRef idx="minor">
-            <a:schemeClr val="dk1"/>
-          </a:fontRef>
-        </p:style>
-        <p:txBody>
-          <a:bodyPr rtlCol="0" anchor="ctr"/>
-          <a:lstStyle/>
-          <a:p>
-            <a:pPr algn="ctr"/>
-            <a:r>
-              <a:rPr lang="de-DE" dirty="0">
-                <a:solidFill>
-                  <a:srgbClr val="8CD000"/>
-                </a:solidFill>
-                <a:latin typeface="LM Roman 10" pitchFamily="2" charset="77"/>
-              </a:rPr>
-              <a:t>Zugänglichkeit der Evidenz </a:t>
-            </a:r>
-          </a:p>
-        </p:txBody>
-      </p:sp>
       <p:sp>
         <p:nvSpPr>
           <p:cNvPr id="33" name="Rectangle: Rounded Corners 6">
@@ -12096,7 +11728,7 @@
 </file>
 
 <file path=ppt/slides/slide7.xml><?xml version="1.0" encoding="utf-8"?>
-<p:sld xmlns:a="http://schemas.openxmlformats.org/drawingml/2006/main" xmlns:r="http://schemas.openxmlformats.org/officeDocument/2006/relationships" xmlns:p="http://schemas.openxmlformats.org/presentationml/2006/main">
+<p:sld xmlns:a="http://schemas.openxmlformats.org/drawingml/2006/main" xmlns:r="http://schemas.openxmlformats.org/officeDocument/2006/relationships" xmlns:p="http://schemas.openxmlformats.org/presentationml/2006/main" show="0">
   <p:cSld>
     <p:spTree>
       <p:nvGrpSpPr>
